--- a/课件/C1/C1-B-04/C1-B-04.pptx
+++ b/课件/C1/C1-B-04/C1-B-04.pptx
@@ -20,9 +20,11 @@
     <p:sldId id="268" r:id="rId14"/>
     <p:sldId id="269" r:id="rId15"/>
     <p:sldId id="270" r:id="rId16"/>
+    <p:sldId id="271" r:id="rId17"/>
+    <p:sldId id="272" r:id="rId18"/>
   </p:sldIdLst>
   <p:notesMasterIdLst>
-    <p:notesMasterId r:id="rId17"/>
+    <p:notesMasterId r:id="rId19"/>
   </p:notesMasterIdLst>
   <p:sldSz cx="12191695" cy="6858000"/>
   <p:notesSz cx="6858000" cy="12191695"/>
@@ -1068,6 +1070,182 @@
             <a:fld id="{F7021451-1387-4CA6-816F-3879F97B5CBC}" type="slidenum">
               <a:rPr lang="en-US"/>
               <a:t>15</a:t>
+            </a:fld>
+            <a:endParaRPr lang="en-US"/>
+          </a:p>
+        </p:txBody>
+      </p:sp>
+    </p:spTree>
+    <p:extLst>
+      <p:ext uri="{BB962C8B-B14F-4D97-AF65-F5344CB8AC3E}">
+        <p14:creationId xmlns:p14="http://schemas.microsoft.com/office/powerpoint/2010/main" val="1024086991"/>
+      </p:ext>
+    </p:extLst>
+  </p:cSld>
+  <p:clrMapOvr>
+    <a:masterClrMapping/>
+  </p:clrMapOvr>
+</p:notes>
+</file>
+
+<file path=ppt/notesSlides/notesSlide16.xml><?xml version="1.0" encoding="utf-8"?>
+<p:notes xmlns:a="http://schemas.openxmlformats.org/drawingml/2006/main" xmlns:r="http://schemas.openxmlformats.org/officeDocument/2006/relationships" xmlns:p="http://schemas.openxmlformats.org/presentationml/2006/main">
+  <p:cSld>
+    <p:spTree>
+      <p:nvGrpSpPr>
+        <p:cNvPr id="1" name=""/>
+        <p:cNvGrpSpPr/>
+        <p:nvPr/>
+      </p:nvGrpSpPr>
+      <p:grpSpPr>
+        <a:xfrm>
+          <a:off x="0" y="0"/>
+          <a:ext cx="0" cy="0"/>
+          <a:chOff x="0" y="0"/>
+          <a:chExt cx="0" cy="0"/>
+        </a:xfrm>
+      </p:grpSpPr>
+      <p:sp>
+        <p:nvSpPr>
+          <p:cNvPr id="2" name="Slide Image Placeholder 1"/>
+          <p:cNvSpPr>
+            <a:spLocks noGrp="1" noRot="1" noChangeAspect="1"/>
+          </p:cNvSpPr>
+          <p:nvPr>
+            <p:ph type="sldImg"/>
+          </p:nvPr>
+        </p:nvSpPr>
+        <p:spPr/>
+      </p:sp>
+      <p:sp>
+        <p:nvSpPr>
+          <p:cNvPr id="3" name="Notes Placeholder 2"/>
+          <p:cNvSpPr>
+            <a:spLocks noGrp="1"/>
+          </p:cNvSpPr>
+          <p:nvPr>
+            <p:ph type="body" idx="1"/>
+          </p:nvPr>
+        </p:nvSpPr>
+        <p:spPr/>
+        <p:txBody>
+          <a:bodyPr/>
+          <a:lstStyle/>
+          <a:p>
+            <a:r>
+              <a:rPr lang="en-US" dirty="0"/>
+              <a:t/>
+            </a:r>
+            <a:endParaRPr lang="en-US" dirty="0"/>
+          </a:p>
+        </p:txBody>
+      </p:sp>
+      <p:sp>
+        <p:nvSpPr>
+          <p:cNvPr id="4" name="Slide Number Placeholder 3"/>
+          <p:cNvSpPr>
+            <a:spLocks noGrp="1"/>
+          </p:cNvSpPr>
+          <p:nvPr>
+            <p:ph type="sldNum" sz="quarter" idx="10"/>
+          </p:nvPr>
+        </p:nvSpPr>
+        <p:spPr/>
+        <p:txBody>
+          <a:bodyPr/>
+          <a:lstStyle/>
+          <a:p>
+            <a:fld id="{F7021451-1387-4CA6-816F-3879F97B5CBC}" type="slidenum">
+              <a:rPr lang="en-US"/>
+              <a:t>16</a:t>
+            </a:fld>
+            <a:endParaRPr lang="en-US"/>
+          </a:p>
+        </p:txBody>
+      </p:sp>
+    </p:spTree>
+    <p:extLst>
+      <p:ext uri="{BB962C8B-B14F-4D97-AF65-F5344CB8AC3E}">
+        <p14:creationId xmlns:p14="http://schemas.microsoft.com/office/powerpoint/2010/main" val="1024086991"/>
+      </p:ext>
+    </p:extLst>
+  </p:cSld>
+  <p:clrMapOvr>
+    <a:masterClrMapping/>
+  </p:clrMapOvr>
+</p:notes>
+</file>
+
+<file path=ppt/notesSlides/notesSlide17.xml><?xml version="1.0" encoding="utf-8"?>
+<p:notes xmlns:a="http://schemas.openxmlformats.org/drawingml/2006/main" xmlns:r="http://schemas.openxmlformats.org/officeDocument/2006/relationships" xmlns:p="http://schemas.openxmlformats.org/presentationml/2006/main">
+  <p:cSld>
+    <p:spTree>
+      <p:nvGrpSpPr>
+        <p:cNvPr id="1" name=""/>
+        <p:cNvGrpSpPr/>
+        <p:nvPr/>
+      </p:nvGrpSpPr>
+      <p:grpSpPr>
+        <a:xfrm>
+          <a:off x="0" y="0"/>
+          <a:ext cx="0" cy="0"/>
+          <a:chOff x="0" y="0"/>
+          <a:chExt cx="0" cy="0"/>
+        </a:xfrm>
+      </p:grpSpPr>
+      <p:sp>
+        <p:nvSpPr>
+          <p:cNvPr id="2" name="Slide Image Placeholder 1"/>
+          <p:cNvSpPr>
+            <a:spLocks noGrp="1" noRot="1" noChangeAspect="1"/>
+          </p:cNvSpPr>
+          <p:nvPr>
+            <p:ph type="sldImg"/>
+          </p:nvPr>
+        </p:nvSpPr>
+        <p:spPr/>
+      </p:sp>
+      <p:sp>
+        <p:nvSpPr>
+          <p:cNvPr id="3" name="Notes Placeholder 2"/>
+          <p:cNvSpPr>
+            <a:spLocks noGrp="1"/>
+          </p:cNvSpPr>
+          <p:nvPr>
+            <p:ph type="body" idx="1"/>
+          </p:nvPr>
+        </p:nvSpPr>
+        <p:spPr/>
+        <p:txBody>
+          <a:bodyPr/>
+          <a:lstStyle/>
+          <a:p>
+            <a:r>
+              <a:rPr lang="en-US" dirty="0"/>
+              <a:t/>
+            </a:r>
+            <a:endParaRPr lang="en-US" dirty="0"/>
+          </a:p>
+        </p:txBody>
+      </p:sp>
+      <p:sp>
+        <p:nvSpPr>
+          <p:cNvPr id="4" name="Slide Number Placeholder 3"/>
+          <p:cNvSpPr>
+            <a:spLocks noGrp="1"/>
+          </p:cNvSpPr>
+          <p:nvPr>
+            <p:ph type="sldNum" sz="quarter" idx="10"/>
+          </p:nvPr>
+        </p:nvSpPr>
+        <p:spPr/>
+        <p:txBody>
+          <a:bodyPr/>
+          <a:lstStyle/>
+          <a:p>
+            <a:fld id="{F7021451-1387-4CA6-816F-3879F97B5CBC}" type="slidenum">
+              <a:rPr lang="en-US"/>
+              <a:t>17</a:t>
             </a:fld>
             <a:endParaRPr lang="en-US"/>
           </a:p>
@@ -2161,7 +2339,7 @@
                 <a:ea typeface="微软雅黑" pitchFamily="34" charset="-122"/>
                 <a:cs typeface="微软雅黑" pitchFamily="34" charset="-120"/>
               </a:rPr>
-              <a:t>1 / 15</a:t>
+              <a:t>1 / 17</a:t>
             </a:r>
             <a:endParaRPr lang="en-US" sz="1000" dirty="0"/>
           </a:p>
@@ -2395,7 +2573,7 @@
                 <a:ea typeface="微软雅黑" pitchFamily="34" charset="-122"/>
                 <a:cs typeface="微软雅黑" pitchFamily="34" charset="-120"/>
               </a:rPr>
-              <a:t>10 / 15</a:t>
+              <a:t>10 / 17</a:t>
             </a:r>
             <a:endParaRPr lang="en-US" sz="1000" dirty="0"/>
           </a:p>
@@ -2494,19 +2672,34 @@
             <a:avLst/>
           </a:prstGeom>
           <a:solidFill>
-            <a:srgbClr val="F5F6F7"/>
+            <a:srgbClr val="F7F9FC"/>
           </a:solidFill>
-          <a:ln w="9525">
-            <a:solidFill>
-              <a:srgbClr val="D8DBE0"/>
-            </a:solidFill>
-            <a:prstDash val="solid"/>
-          </a:ln>
-        </p:spPr>
-      </p:sp>
-      <p:sp>
-        <p:nvSpPr>
-          <p:cNvPr id="6" name="Text 4"/>
+          <a:ln/>
+        </p:spPr>
+      </p:sp>
+      <p:sp>
+        <p:nvSpPr>
+          <p:cNvPr id="6" name="Shape 4"/>
+          <p:cNvSpPr/>
+          <p:nvPr/>
+        </p:nvSpPr>
+        <p:spPr>
+          <a:xfrm>
+            <a:off x="822960" y="2395728"/>
+            <a:ext cx="50292" cy="1508760"/>
+          </a:xfrm>
+          <a:prstGeom prst="rect">
+            <a:avLst/>
+          </a:prstGeom>
+          <a:solidFill>
+            <a:srgbClr val="1F4E9C"/>
+          </a:solidFill>
+          <a:ln/>
+        </p:spPr>
+      </p:sp>
+      <p:sp>
+        <p:nvSpPr>
+          <p:cNvPr id="7" name="Text 5"/>
           <p:cNvSpPr/>
           <p:nvPr/>
         </p:nvSpPr>
@@ -2552,7 +2745,7 @@
       </p:sp>
       <p:sp>
         <p:nvSpPr>
-          <p:cNvPr id="7" name="Text 5"/>
+          <p:cNvPr id="8" name="Text 6"/>
           <p:cNvSpPr/>
           <p:nvPr/>
         </p:nvSpPr>
@@ -2608,7 +2801,7 @@
       </p:sp>
       <p:sp>
         <p:nvSpPr>
-          <p:cNvPr id="8" name="Text 6"/>
+          <p:cNvPr id="9" name="Text 7"/>
           <p:cNvSpPr/>
           <p:nvPr/>
         </p:nvSpPr>
@@ -2664,7 +2857,7 @@
       </p:sp>
       <p:sp>
         <p:nvSpPr>
-          <p:cNvPr id="9" name="Text 7"/>
+          <p:cNvPr id="10" name="Text 8"/>
           <p:cNvSpPr/>
           <p:nvPr/>
         </p:nvSpPr>
@@ -2818,7 +3011,7 @@
                 <a:ea typeface="微软雅黑" pitchFamily="34" charset="-122"/>
                 <a:cs typeface="微软雅黑" pitchFamily="34" charset="-120"/>
               </a:rPr>
-              <a:t>11 / 15</a:t>
+              <a:t>11 / 17</a:t>
             </a:r>
             <a:endParaRPr lang="en-US" sz="1000" dirty="0"/>
           </a:p>
@@ -3142,7 +3335,7 @@
                 <a:ea typeface="微软雅黑" pitchFamily="34" charset="-122"/>
                 <a:cs typeface="微软雅黑" pitchFamily="34" charset="-120"/>
               </a:rPr>
-              <a:t>12 / 15</a:t>
+              <a:t>12 / 17</a:t>
             </a:r>
             <a:endParaRPr lang="en-US" sz="1000" dirty="0"/>
           </a:p>
@@ -3522,7 +3715,7 @@
                 <a:ea typeface="微软雅黑" pitchFamily="34" charset="-122"/>
                 <a:cs typeface="微软雅黑" pitchFamily="34" charset="-120"/>
               </a:rPr>
-              <a:t>13 / 15</a:t>
+              <a:t>13 / 17</a:t>
             </a:r>
             <a:endParaRPr lang="en-US" sz="1000" dirty="0"/>
           </a:p>
@@ -4299,7 +4492,7 @@
                 <a:ea typeface="微软雅黑" pitchFamily="34" charset="-122"/>
                 <a:cs typeface="微软雅黑" pitchFamily="34" charset="-120"/>
               </a:rPr>
-              <a:t>14 / 15</a:t>
+              <a:t>14 / 17</a:t>
             </a:r>
             <a:endParaRPr lang="en-US" sz="1000" dirty="0"/>
           </a:p>
@@ -4662,7 +4855,7 @@
                 <a:ea typeface="微软雅黑" pitchFamily="34" charset="-122"/>
                 <a:cs typeface="微软雅黑" pitchFamily="34" charset="-120"/>
               </a:rPr>
-              <a:t>15 / 15</a:t>
+              <a:t>15 / 17</a:t>
             </a:r>
             <a:endParaRPr lang="en-US" sz="1000" dirty="0"/>
           </a:p>
@@ -4975,9 +5168,781 @@
                 <a:ea typeface="微软雅黑" pitchFamily="34" charset="-122"/>
                 <a:cs typeface="微软雅黑" pitchFamily="34" charset="-120"/>
               </a:rPr>
-              <a:t>参考答案在讲稿附录一</a:t>
+              <a:t>参考答案在本PPT最后两页，课后自行对照</a:t>
             </a:r>
             <a:endParaRPr lang="en-US" sz="1500" dirty="0"/>
+          </a:p>
+        </p:txBody>
+      </p:sp>
+    </p:spTree>
+  </p:cSld>
+  <p:clrMapOvr>
+    <a:masterClrMapping/>
+  </p:clrMapOvr>
+</p:sld>
+</file>
+
+<file path=ppt/slides/slide16.xml><?xml version="1.0" encoding="utf-8"?>
+<p:sld xmlns:a="http://schemas.openxmlformats.org/drawingml/2006/main" xmlns:r="http://schemas.openxmlformats.org/officeDocument/2006/relationships" xmlns:p="http://schemas.openxmlformats.org/presentationml/2006/main">
+  <p:cSld name="Slide 16">
+    <p:bg>
+      <p:bgPr>
+        <a:blipFill dpi="0" rotWithShape="1">
+          <a:blip r:embed="rId1">
+            <a:lum/>
+          </a:blip>
+          <a:srcRect/>
+          <a:stretch>
+            <a:fillRect/>
+          </a:stretch>
+        </a:blipFill>
+        <a:effectLst/>
+      </p:bgPr>
+    </p:bg>
+    <p:spTree>
+      <p:nvGrpSpPr>
+        <p:cNvPr id="1" name=""/>
+        <p:cNvGrpSpPr/>
+        <p:nvPr/>
+      </p:nvGrpSpPr>
+      <p:grpSpPr>
+        <a:xfrm>
+          <a:off x="0" y="0"/>
+          <a:ext cx="0" cy="0"/>
+          <a:chOff x="0" y="0"/>
+          <a:chExt cx="0" cy="0"/>
+        </a:xfrm>
+      </p:grpSpPr>
+      <p:sp>
+        <p:nvSpPr>
+          <p:cNvPr id="2" name="Text 0"/>
+          <p:cNvSpPr/>
+          <p:nvPr/>
+        </p:nvSpPr>
+        <p:spPr>
+          <a:xfrm>
+            <a:off x="10362895" y="6016752"/>
+            <a:ext cx="1463040" cy="320040"/>
+          </a:xfrm>
+          <a:prstGeom prst="rect">
+            <a:avLst/>
+          </a:prstGeom>
+          <a:noFill/>
+          <a:ln/>
+        </p:spPr>
+        <p:txBody>
+          <a:bodyPr wrap="square" rtlCol="0" anchor="ctr"/>
+          <a:lstStyle/>
+          <a:p>
+            <a:pPr algn="r" indent="0" marL="0">
+              <a:buNone/>
+            </a:pPr>
+            <a:r>
+              <a:rPr lang="en-US" sz="1000" dirty="0">
+                <a:solidFill>
+                  <a:srgbClr val="8A9099"/>
+                </a:solidFill>
+                <a:latin typeface="微软雅黑" pitchFamily="34" charset="0"/>
+                <a:ea typeface="微软雅黑" pitchFamily="34" charset="-122"/>
+                <a:cs typeface="微软雅黑" pitchFamily="34" charset="-120"/>
+              </a:rPr>
+              <a:t>16 / 17</a:t>
+            </a:r>
+            <a:endParaRPr lang="en-US" sz="1000" dirty="0"/>
+          </a:p>
+        </p:txBody>
+      </p:sp>
+      <p:sp>
+        <p:nvSpPr>
+          <p:cNvPr id="3" name="Text 1"/>
+          <p:cNvSpPr/>
+          <p:nvPr/>
+        </p:nvSpPr>
+        <p:spPr>
+          <a:xfrm>
+            <a:off x="822960" y="960120"/>
+            <a:ext cx="10545775" cy="365760"/>
+          </a:xfrm>
+          <a:prstGeom prst="rect">
+            <a:avLst/>
+          </a:prstGeom>
+          <a:noFill/>
+          <a:ln/>
+        </p:spPr>
+        <p:txBody>
+          <a:bodyPr wrap="square" rtlCol="0" anchor="ctr"/>
+          <a:lstStyle/>
+          <a:p>
+            <a:pPr algn="l" indent="0" marL="0">
+              <a:buNone/>
+            </a:pPr>
+            <a:r>
+              <a:rPr lang="en-US" sz="1400" b="1" dirty="0">
+                <a:solidFill>
+                  <a:srgbClr val="1F4E9C"/>
+                </a:solidFill>
+                <a:latin typeface="微软雅黑" pitchFamily="34" charset="0"/>
+                <a:ea typeface="微软雅黑" pitchFamily="34" charset="-122"/>
+                <a:cs typeface="微软雅黑" pitchFamily="34" charset="-120"/>
+              </a:rPr>
+              <a:t>参考答案 · 跟练题</a:t>
+            </a:r>
+            <a:endParaRPr lang="en-US" sz="1400" dirty="0"/>
+          </a:p>
+        </p:txBody>
+      </p:sp>
+      <p:sp>
+        <p:nvSpPr>
+          <p:cNvPr id="4" name="Text 2"/>
+          <p:cNvSpPr/>
+          <p:nvPr/>
+        </p:nvSpPr>
+        <p:spPr>
+          <a:xfrm>
+            <a:off x="822960" y="1344168"/>
+            <a:ext cx="10545775" cy="731520"/>
+          </a:xfrm>
+          <a:prstGeom prst="rect">
+            <a:avLst/>
+          </a:prstGeom>
+          <a:noFill/>
+          <a:ln/>
+        </p:spPr>
+        <p:txBody>
+          <a:bodyPr wrap="square" rtlCol="0" anchor="ctr"/>
+          <a:lstStyle/>
+          <a:p>
+            <a:pPr algn="l" indent="0" marL="0">
+              <a:buNone/>
+            </a:pPr>
+            <a:r>
+              <a:rPr lang="en-US" sz="2800" b="1" dirty="0">
+                <a:solidFill>
+                  <a:srgbClr val="1F2329"/>
+                </a:solidFill>
+                <a:latin typeface="微软雅黑" pitchFamily="34" charset="0"/>
+                <a:ea typeface="微软雅黑" pitchFamily="34" charset="-122"/>
+                <a:cs typeface="微软雅黑" pitchFamily="34" charset="-120"/>
+              </a:rPr>
+              <a:t>跟练题参考答案（自行对照）</a:t>
+            </a:r>
+            <a:endParaRPr lang="en-US" sz="2800" dirty="0"/>
+          </a:p>
+        </p:txBody>
+      </p:sp>
+      <p:sp>
+        <p:nvSpPr>
+          <p:cNvPr id="5" name="Shape 3"/>
+          <p:cNvSpPr/>
+          <p:nvPr/>
+        </p:nvSpPr>
+        <p:spPr>
+          <a:xfrm>
+            <a:off x="822960" y="2395728"/>
+            <a:ext cx="10545775" cy="2221992"/>
+          </a:xfrm>
+          <a:prstGeom prst="rect">
+            <a:avLst/>
+          </a:prstGeom>
+          <a:solidFill>
+            <a:srgbClr val="F7F9FC"/>
+          </a:solidFill>
+          <a:ln/>
+        </p:spPr>
+      </p:sp>
+      <p:sp>
+        <p:nvSpPr>
+          <p:cNvPr id="6" name="Shape 4"/>
+          <p:cNvSpPr/>
+          <p:nvPr/>
+        </p:nvSpPr>
+        <p:spPr>
+          <a:xfrm>
+            <a:off x="822960" y="2395728"/>
+            <a:ext cx="50292" cy="2221992"/>
+          </a:xfrm>
+          <a:prstGeom prst="rect">
+            <a:avLst/>
+          </a:prstGeom>
+          <a:solidFill>
+            <a:srgbClr val="1F4E9C"/>
+          </a:solidFill>
+          <a:ln/>
+        </p:spPr>
+      </p:sp>
+      <p:sp>
+        <p:nvSpPr>
+          <p:cNvPr id="7" name="Text 5"/>
+          <p:cNvSpPr/>
+          <p:nvPr/>
+        </p:nvSpPr>
+        <p:spPr>
+          <a:xfrm>
+            <a:off x="1078992" y="2505456"/>
+            <a:ext cx="10033711" cy="2002536"/>
+          </a:xfrm>
+          <a:prstGeom prst="rect">
+            <a:avLst/>
+          </a:prstGeom>
+          <a:noFill/>
+          <a:ln/>
+        </p:spPr>
+        <p:txBody>
+          <a:bodyPr wrap="square" rtlCol="0" anchor="t"/>
+          <a:lstStyle/>
+          <a:p>
+            <a:pPr algn="l" indent="0" marL="0">
+              <a:lnSpc>
+                <a:spcPct val="125000"/>
+              </a:lnSpc>
+              <a:buNone/>
+            </a:pPr>
+            <a:r>
+              <a:rPr lang="en-US" sz="1400" dirty="0">
+                <a:solidFill>
+                  <a:srgbClr val="1F2329"/>
+                </a:solidFill>
+                <a:latin typeface="Consolas" pitchFamily="34" charset="0"/>
+                <a:ea typeface="Consolas" pitchFamily="34" charset="-122"/>
+                <a:cs typeface="Consolas" pitchFamily="34" charset="-120"/>
+              </a:rPr>
+              <a:t>// malloc全流程：申请→判空→使用→归还→置NULL
+int *p = (int *)malloc(sizeof(int));
+if (p == NULL) return 1;
+*p = 88;
+printf("%d\n", *p);   // 88
+free(p);
+p = NULL;
+</a:t>
+            </a:r>
+            <a:endParaRPr lang="en-US" sz="1400" dirty="0"/>
+          </a:p>
+        </p:txBody>
+      </p:sp>
+      <p:sp>
+        <p:nvSpPr>
+          <p:cNvPr id="8" name="Text 6"/>
+          <p:cNvSpPr/>
+          <p:nvPr/>
+        </p:nvSpPr>
+        <p:spPr>
+          <a:xfrm>
+            <a:off x="896112" y="4818888"/>
+            <a:ext cx="10454335" cy="740664"/>
+          </a:xfrm>
+          <a:prstGeom prst="rect">
+            <a:avLst/>
+          </a:prstGeom>
+          <a:noFill/>
+          <a:ln/>
+        </p:spPr>
+        <p:txBody>
+          <a:bodyPr wrap="square" rtlCol="0" anchor="t"/>
+          <a:lstStyle/>
+          <a:p>
+            <a:pPr algn="l" indent="0" marL="0">
+              <a:lnSpc>
+                <a:spcPct val="115000"/>
+              </a:lnSpc>
+              <a:buNone/>
+            </a:pPr>
+            <a:r>
+              <a:rPr lang="en-US" sz="1800" b="1" dirty="0">
+                <a:solidFill>
+                  <a:srgbClr val="1F4E9C"/>
+                </a:solidFill>
+                <a:latin typeface="微软雅黑" pitchFamily="34" charset="0"/>
+                <a:ea typeface="微软雅黑" pitchFamily="34" charset="-122"/>
+                <a:cs typeface="微软雅黑" pitchFamily="34" charset="-120"/>
+              </a:rPr>
+              <a:t>•  </a:t>
+            </a:r>
+            <a:pPr algn="l" indent="0" marL="0">
+              <a:lnSpc>
+                <a:spcPct val="115000"/>
+              </a:lnSpc>
+              <a:buNone/>
+            </a:pPr>
+            <a:r>
+              <a:rPr lang="en-US" sz="1800" dirty="0">
+                <a:solidFill>
+                  <a:srgbClr val="000000"/>
+                </a:solidFill>
+              </a:rPr>
+              <a:t>内存图四步：申请后箭头跨区指堆→填值→free后格子涂掉箭头还在→置NULL箭头消失</a:t>
+            </a:r>
+            <a:endParaRPr lang="en-US" sz="1800" dirty="0"/>
+          </a:p>
+        </p:txBody>
+      </p:sp>
+      <p:sp>
+        <p:nvSpPr>
+          <p:cNvPr id="9" name="Text 7"/>
+          <p:cNvSpPr/>
+          <p:nvPr/>
+        </p:nvSpPr>
+        <p:spPr>
+          <a:xfrm>
+            <a:off x="896112" y="5632704"/>
+            <a:ext cx="10454335" cy="397764"/>
+          </a:xfrm>
+          <a:prstGeom prst="rect">
+            <a:avLst/>
+          </a:prstGeom>
+          <a:noFill/>
+          <a:ln/>
+        </p:spPr>
+        <p:txBody>
+          <a:bodyPr wrap="square" rtlCol="0" anchor="t"/>
+          <a:lstStyle/>
+          <a:p>
+            <a:pPr algn="l" indent="0" marL="0">
+              <a:lnSpc>
+                <a:spcPct val="115000"/>
+              </a:lnSpc>
+              <a:buNone/>
+            </a:pPr>
+            <a:r>
+              <a:rPr lang="en-US" sz="1800" b="1" dirty="0">
+                <a:solidFill>
+                  <a:srgbClr val="1F4E9C"/>
+                </a:solidFill>
+                <a:latin typeface="微软雅黑" pitchFamily="34" charset="0"/>
+                <a:ea typeface="微软雅黑" pitchFamily="34" charset="-122"/>
+                <a:cs typeface="微软雅黑" pitchFamily="34" charset="-120"/>
+              </a:rPr>
+              <a:t>•  </a:t>
+            </a:r>
+            <a:pPr algn="l" indent="0" marL="0">
+              <a:lnSpc>
+                <a:spcPct val="115000"/>
+              </a:lnSpc>
+              <a:buNone/>
+            </a:pPr>
+            <a:r>
+              <a:rPr lang="en-US" sz="1800" dirty="0">
+                <a:solidFill>
+                  <a:srgbClr val="000000"/>
+                </a:solidFill>
+              </a:rPr>
+              <a:t>判空和置NULL都不能省，一个防申请失败，一个防悬空指针</a:t>
+            </a:r>
+            <a:endParaRPr lang="en-US" sz="1800" dirty="0"/>
+          </a:p>
+        </p:txBody>
+      </p:sp>
+    </p:spTree>
+  </p:cSld>
+  <p:clrMapOvr>
+    <a:masterClrMapping/>
+  </p:clrMapOvr>
+</p:sld>
+</file>
+
+<file path=ppt/slides/slide17.xml><?xml version="1.0" encoding="utf-8"?>
+<p:sld xmlns:a="http://schemas.openxmlformats.org/drawingml/2006/main" xmlns:r="http://schemas.openxmlformats.org/officeDocument/2006/relationships" xmlns:p="http://schemas.openxmlformats.org/presentationml/2006/main">
+  <p:cSld name="Slide 17">
+    <p:bg>
+      <p:bgPr>
+        <a:blipFill dpi="0" rotWithShape="1">
+          <a:blip r:embed="rId1">
+            <a:lum/>
+          </a:blip>
+          <a:srcRect/>
+          <a:stretch>
+            <a:fillRect/>
+          </a:stretch>
+        </a:blipFill>
+        <a:effectLst/>
+      </p:bgPr>
+    </p:bg>
+    <p:spTree>
+      <p:nvGrpSpPr>
+        <p:cNvPr id="1" name=""/>
+        <p:cNvGrpSpPr/>
+        <p:nvPr/>
+      </p:nvGrpSpPr>
+      <p:grpSpPr>
+        <a:xfrm>
+          <a:off x="0" y="0"/>
+          <a:ext cx="0" cy="0"/>
+          <a:chOff x="0" y="0"/>
+          <a:chExt cx="0" cy="0"/>
+        </a:xfrm>
+      </p:grpSpPr>
+      <p:sp>
+        <p:nvSpPr>
+          <p:cNvPr id="2" name="Text 0"/>
+          <p:cNvSpPr/>
+          <p:nvPr/>
+        </p:nvSpPr>
+        <p:spPr>
+          <a:xfrm>
+            <a:off x="10362895" y="6016752"/>
+            <a:ext cx="1463040" cy="320040"/>
+          </a:xfrm>
+          <a:prstGeom prst="rect">
+            <a:avLst/>
+          </a:prstGeom>
+          <a:noFill/>
+          <a:ln/>
+        </p:spPr>
+        <p:txBody>
+          <a:bodyPr wrap="square" rtlCol="0" anchor="ctr"/>
+          <a:lstStyle/>
+          <a:p>
+            <a:pPr algn="r" indent="0" marL="0">
+              <a:buNone/>
+            </a:pPr>
+            <a:r>
+              <a:rPr lang="en-US" sz="1000" dirty="0">
+                <a:solidFill>
+                  <a:srgbClr val="8A9099"/>
+                </a:solidFill>
+                <a:latin typeface="微软雅黑" pitchFamily="34" charset="0"/>
+                <a:ea typeface="微软雅黑" pitchFamily="34" charset="-122"/>
+                <a:cs typeface="微软雅黑" pitchFamily="34" charset="-120"/>
+              </a:rPr>
+              <a:t>17 / 17</a:t>
+            </a:r>
+            <a:endParaRPr lang="en-US" sz="1000" dirty="0"/>
+          </a:p>
+        </p:txBody>
+      </p:sp>
+      <p:sp>
+        <p:nvSpPr>
+          <p:cNvPr id="3" name="Text 1"/>
+          <p:cNvSpPr/>
+          <p:nvPr/>
+        </p:nvSpPr>
+        <p:spPr>
+          <a:xfrm>
+            <a:off x="822960" y="960120"/>
+            <a:ext cx="10545775" cy="365760"/>
+          </a:xfrm>
+          <a:prstGeom prst="rect">
+            <a:avLst/>
+          </a:prstGeom>
+          <a:noFill/>
+          <a:ln/>
+        </p:spPr>
+        <p:txBody>
+          <a:bodyPr wrap="square" rtlCol="0" anchor="ctr"/>
+          <a:lstStyle/>
+          <a:p>
+            <a:pPr algn="l" indent="0" marL="0">
+              <a:buNone/>
+            </a:pPr>
+            <a:r>
+              <a:rPr lang="en-US" sz="1400" b="1" dirty="0">
+                <a:solidFill>
+                  <a:srgbClr val="1F4E9C"/>
+                </a:solidFill>
+                <a:latin typeface="微软雅黑" pitchFamily="34" charset="0"/>
+                <a:ea typeface="微软雅黑" pitchFamily="34" charset="-122"/>
+                <a:cs typeface="微软雅黑" pitchFamily="34" charset="-120"/>
+              </a:rPr>
+              <a:t>参考答案 · 模仿题</a:t>
+            </a:r>
+            <a:endParaRPr lang="en-US" sz="1400" dirty="0"/>
+          </a:p>
+        </p:txBody>
+      </p:sp>
+      <p:sp>
+        <p:nvSpPr>
+          <p:cNvPr id="4" name="Text 2"/>
+          <p:cNvSpPr/>
+          <p:nvPr/>
+        </p:nvSpPr>
+        <p:spPr>
+          <a:xfrm>
+            <a:off x="822960" y="1344168"/>
+            <a:ext cx="10545775" cy="731520"/>
+          </a:xfrm>
+          <a:prstGeom prst="rect">
+            <a:avLst/>
+          </a:prstGeom>
+          <a:noFill/>
+          <a:ln/>
+        </p:spPr>
+        <p:txBody>
+          <a:bodyPr wrap="square" rtlCol="0" anchor="ctr"/>
+          <a:lstStyle/>
+          <a:p>
+            <a:pPr algn="l" indent="0" marL="0">
+              <a:buNone/>
+            </a:pPr>
+            <a:r>
+              <a:rPr lang="en-US" sz="2800" b="1" dirty="0">
+                <a:solidFill>
+                  <a:srgbClr val="1F2329"/>
+                </a:solidFill>
+                <a:latin typeface="微软雅黑" pitchFamily="34" charset="0"/>
+                <a:ea typeface="微软雅黑" pitchFamily="34" charset="-122"/>
+                <a:cs typeface="微软雅黑" pitchFamily="34" charset="-120"/>
+              </a:rPr>
+              <a:t>模仿题参考答案（自行对照）</a:t>
+            </a:r>
+            <a:endParaRPr lang="en-US" sz="2800" dirty="0"/>
+          </a:p>
+        </p:txBody>
+      </p:sp>
+      <p:sp>
+        <p:nvSpPr>
+          <p:cNvPr id="5" name="Shape 3"/>
+          <p:cNvSpPr/>
+          <p:nvPr/>
+        </p:nvSpPr>
+        <p:spPr>
+          <a:xfrm>
+            <a:off x="822960" y="2395728"/>
+            <a:ext cx="10545775" cy="2186625"/>
+          </a:xfrm>
+          <a:prstGeom prst="rect">
+            <a:avLst/>
+          </a:prstGeom>
+          <a:solidFill>
+            <a:srgbClr val="F7F9FC"/>
+          </a:solidFill>
+          <a:ln/>
+        </p:spPr>
+      </p:sp>
+      <p:sp>
+        <p:nvSpPr>
+          <p:cNvPr id="6" name="Shape 4"/>
+          <p:cNvSpPr/>
+          <p:nvPr/>
+        </p:nvSpPr>
+        <p:spPr>
+          <a:xfrm>
+            <a:off x="822960" y="2395728"/>
+            <a:ext cx="50292" cy="2186625"/>
+          </a:xfrm>
+          <a:prstGeom prst="rect">
+            <a:avLst/>
+          </a:prstGeom>
+          <a:solidFill>
+            <a:srgbClr val="1F4E9C"/>
+          </a:solidFill>
+          <a:ln/>
+        </p:spPr>
+      </p:sp>
+      <p:sp>
+        <p:nvSpPr>
+          <p:cNvPr id="7" name="Text 5"/>
+          <p:cNvSpPr/>
+          <p:nvPr/>
+        </p:nvSpPr>
+        <p:spPr>
+          <a:xfrm>
+            <a:off x="1078992" y="2505456"/>
+            <a:ext cx="10033711" cy="1967169"/>
+          </a:xfrm>
+          <a:prstGeom prst="rect">
+            <a:avLst/>
+          </a:prstGeom>
+          <a:noFill/>
+          <a:ln/>
+        </p:spPr>
+        <p:txBody>
+          <a:bodyPr wrap="square" rtlCol="0" anchor="t"/>
+          <a:lstStyle/>
+          <a:p>
+            <a:pPr algn="l" indent="0" marL="0">
+              <a:lnSpc>
+                <a:spcPct val="125000"/>
+              </a:lnSpc>
+              <a:buNone/>
+            </a:pPr>
+            <a:r>
+              <a:rPr lang="en-US" sz="1100" dirty="0">
+                <a:solidFill>
+                  <a:srgbClr val="1F2329"/>
+                </a:solidFill>
+                <a:latin typeface="Consolas" pitchFamily="34" charset="0"/>
+                <a:ea typeface="Consolas" pitchFamily="34" charset="-122"/>
+                <a:cs typeface="Consolas" pitchFamily="34" charset="-120"/>
+              </a:rPr>
+              <a:t>// 动态数组完整生命周期
+int n;
+scanf("%d", &amp;n);
+int *arr = (int *)malloc(sizeof(int) * n);
+if (arr == NULL) return 1;
+for(int i = 0; i &lt; n; i++) arr[i] = i;
+for(int i = 0; i &lt; n; i++) printf("%d ", arr[i]);
+free(arr);
+arr = NULL;
+</a:t>
+            </a:r>
+            <a:endParaRPr lang="en-US" sz="1100" dirty="0"/>
+          </a:p>
+        </p:txBody>
+      </p:sp>
+      <p:sp>
+        <p:nvSpPr>
+          <p:cNvPr id="8" name="Text 6"/>
+          <p:cNvSpPr/>
+          <p:nvPr/>
+        </p:nvSpPr>
+        <p:spPr>
+          <a:xfrm>
+            <a:off x="896112" y="4783521"/>
+            <a:ext cx="10454335" cy="321564"/>
+          </a:xfrm>
+          <a:prstGeom prst="rect">
+            <a:avLst/>
+          </a:prstGeom>
+          <a:noFill/>
+          <a:ln/>
+        </p:spPr>
+        <p:txBody>
+          <a:bodyPr wrap="square" rtlCol="0" anchor="t"/>
+          <a:lstStyle/>
+          <a:p>
+            <a:pPr algn="l" indent="0" marL="0">
+              <a:lnSpc>
+                <a:spcPct val="115000"/>
+              </a:lnSpc>
+              <a:buNone/>
+            </a:pPr>
+            <a:r>
+              <a:rPr lang="en-US" sz="1400" b="1" dirty="0">
+                <a:solidFill>
+                  <a:srgbClr val="1F4E9C"/>
+                </a:solidFill>
+                <a:latin typeface="微软雅黑" pitchFamily="34" charset="0"/>
+                <a:ea typeface="微软雅黑" pitchFamily="34" charset="-122"/>
+                <a:cs typeface="微软雅黑" pitchFamily="34" charset="-120"/>
+              </a:rPr>
+              <a:t>•  </a:t>
+            </a:r>
+            <a:pPr algn="l" indent="0" marL="0">
+              <a:lnSpc>
+                <a:spcPct val="115000"/>
+              </a:lnSpc>
+              <a:buNone/>
+            </a:pPr>
+            <a:r>
+              <a:rPr lang="en-US" sz="1400" dirty="0">
+                <a:solidFill>
+                  <a:srgbClr val="000000"/>
+                </a:solidFill>
+              </a:rPr>
+              <a:t>字节数是sizeof(int)乘n，不是n；循环边界i&lt;n</a:t>
+            </a:r>
+            <a:endParaRPr lang="en-US" sz="1400" dirty="0"/>
+          </a:p>
+        </p:txBody>
+      </p:sp>
+      <p:sp>
+        <p:nvSpPr>
+          <p:cNvPr id="9" name="Text 7"/>
+          <p:cNvSpPr/>
+          <p:nvPr/>
+        </p:nvSpPr>
+        <p:spPr>
+          <a:xfrm>
+            <a:off x="896112" y="5178237"/>
+            <a:ext cx="10454335" cy="321564"/>
+          </a:xfrm>
+          <a:prstGeom prst="rect">
+            <a:avLst/>
+          </a:prstGeom>
+          <a:noFill/>
+          <a:ln/>
+        </p:spPr>
+        <p:txBody>
+          <a:bodyPr wrap="square" rtlCol="0" anchor="t"/>
+          <a:lstStyle/>
+          <a:p>
+            <a:pPr algn="l" indent="0" marL="0">
+              <a:lnSpc>
+                <a:spcPct val="115000"/>
+              </a:lnSpc>
+              <a:buNone/>
+            </a:pPr>
+            <a:r>
+              <a:rPr lang="en-US" sz="1400" b="1" dirty="0">
+                <a:solidFill>
+                  <a:srgbClr val="1F4E9C"/>
+                </a:solidFill>
+                <a:latin typeface="微软雅黑" pitchFamily="34" charset="0"/>
+                <a:ea typeface="微软雅黑" pitchFamily="34" charset="-122"/>
+                <a:cs typeface="微软雅黑" pitchFamily="34" charset="-120"/>
+              </a:rPr>
+              <a:t>•  </a:t>
+            </a:r>
+            <a:pPr algn="l" indent="0" marL="0">
+              <a:lnSpc>
+                <a:spcPct val="115000"/>
+              </a:lnSpc>
+              <a:buNone/>
+            </a:pPr>
+            <a:r>
+              <a:rPr lang="en-US" sz="1400" dirty="0">
+                <a:solidFill>
+                  <a:srgbClr val="000000"/>
+                </a:solidFill>
+              </a:rPr>
+              <a:t>用完free加置NULL，有借有还</a:t>
+            </a:r>
+            <a:endParaRPr lang="en-US" sz="1400" dirty="0"/>
+          </a:p>
+        </p:txBody>
+      </p:sp>
+      <p:sp>
+        <p:nvSpPr>
+          <p:cNvPr id="10" name="Text 8"/>
+          <p:cNvSpPr/>
+          <p:nvPr/>
+        </p:nvSpPr>
+        <p:spPr>
+          <a:xfrm>
+            <a:off x="896112" y="5572953"/>
+            <a:ext cx="10454335" cy="321564"/>
+          </a:xfrm>
+          <a:prstGeom prst="rect">
+            <a:avLst/>
+          </a:prstGeom>
+          <a:noFill/>
+          <a:ln/>
+        </p:spPr>
+        <p:txBody>
+          <a:bodyPr wrap="square" rtlCol="0" anchor="t"/>
+          <a:lstStyle/>
+          <a:p>
+            <a:pPr algn="l" indent="0" marL="0">
+              <a:lnSpc>
+                <a:spcPct val="115000"/>
+              </a:lnSpc>
+              <a:buNone/>
+            </a:pPr>
+            <a:r>
+              <a:rPr lang="en-US" sz="1400" b="1" dirty="0">
+                <a:solidFill>
+                  <a:srgbClr val="1F4E9C"/>
+                </a:solidFill>
+                <a:latin typeface="微软雅黑" pitchFamily="34" charset="0"/>
+                <a:ea typeface="微软雅黑" pitchFamily="34" charset="-122"/>
+                <a:cs typeface="微软雅黑" pitchFamily="34" charset="-120"/>
+              </a:rPr>
+              <a:t>•  </a:t>
+            </a:r>
+            <a:pPr algn="l" indent="0" marL="0">
+              <a:lnSpc>
+                <a:spcPct val="115000"/>
+              </a:lnSpc>
+              <a:buNone/>
+            </a:pPr>
+            <a:r>
+              <a:rPr lang="en-US" sz="1400" dirty="0">
+                <a:solidFill>
+                  <a:srgbClr val="000000"/>
+                </a:solidFill>
+              </a:rPr>
+              <a:t>代码省略#include &lt;stdio.h&gt;、#include &lt;stdlib.h&gt;与main骨架</a:t>
+            </a:r>
+            <a:endParaRPr lang="en-US" sz="1400" dirty="0"/>
           </a:p>
         </p:txBody>
       </p:sp>
@@ -5053,7 +6018,7 @@
                 <a:ea typeface="微软雅黑" pitchFamily="34" charset="-122"/>
                 <a:cs typeface="微软雅黑" pitchFamily="34" charset="-120"/>
               </a:rPr>
-              <a:t>2 / 15</a:t>
+              <a:t>2 / 17</a:t>
             </a:r>
             <a:endParaRPr lang="en-US" sz="1000" dirty="0"/>
           </a:p>
@@ -5152,19 +6117,34 @@
             <a:avLst/>
           </a:prstGeom>
           <a:solidFill>
-            <a:srgbClr val="F5F6F7"/>
+            <a:srgbClr val="F7F9FC"/>
           </a:solidFill>
-          <a:ln w="9525">
-            <a:solidFill>
-              <a:srgbClr val="D8DBE0"/>
-            </a:solidFill>
-            <a:prstDash val="solid"/>
-          </a:ln>
-        </p:spPr>
-      </p:sp>
-      <p:sp>
-        <p:nvSpPr>
-          <p:cNvPr id="6" name="Text 4"/>
+          <a:ln/>
+        </p:spPr>
+      </p:sp>
+      <p:sp>
+        <p:nvSpPr>
+          <p:cNvPr id="6" name="Shape 4"/>
+          <p:cNvSpPr/>
+          <p:nvPr/>
+        </p:nvSpPr>
+        <p:spPr>
+          <a:xfrm>
+            <a:off x="822960" y="2395728"/>
+            <a:ext cx="50292" cy="1271016"/>
+          </a:xfrm>
+          <a:prstGeom prst="rect">
+            <a:avLst/>
+          </a:prstGeom>
+          <a:solidFill>
+            <a:srgbClr val="1F4E9C"/>
+          </a:solidFill>
+          <a:ln/>
+        </p:spPr>
+      </p:sp>
+      <p:sp>
+        <p:nvSpPr>
+          <p:cNvPr id="7" name="Text 5"/>
           <p:cNvSpPr/>
           <p:nvPr/>
         </p:nvSpPr>
@@ -5209,7 +6189,7 @@
       </p:sp>
       <p:sp>
         <p:nvSpPr>
-          <p:cNvPr id="7" name="Text 5"/>
+          <p:cNvPr id="8" name="Text 6"/>
           <p:cNvSpPr/>
           <p:nvPr/>
         </p:nvSpPr>
@@ -5265,7 +6245,7 @@
       </p:sp>
       <p:sp>
         <p:nvSpPr>
-          <p:cNvPr id="8" name="Text 6"/>
+          <p:cNvPr id="9" name="Text 7"/>
           <p:cNvSpPr/>
           <p:nvPr/>
         </p:nvSpPr>
@@ -5321,7 +6301,7 @@
       </p:sp>
       <p:sp>
         <p:nvSpPr>
-          <p:cNvPr id="9" name="Text 7"/>
+          <p:cNvPr id="10" name="Text 8"/>
           <p:cNvSpPr/>
           <p:nvPr/>
         </p:nvSpPr>
@@ -5475,7 +6455,7 @@
                 <a:ea typeface="微软雅黑" pitchFamily="34" charset="-122"/>
                 <a:cs typeface="微软雅黑" pitchFamily="34" charset="-120"/>
               </a:rPr>
-              <a:t>3 / 15</a:t>
+              <a:t>3 / 17</a:t>
             </a:r>
             <a:endParaRPr lang="en-US" sz="1000" dirty="0"/>
           </a:p>
@@ -5855,7 +6835,7 @@
                 <a:ea typeface="微软雅黑" pitchFamily="34" charset="-122"/>
                 <a:cs typeface="微软雅黑" pitchFamily="34" charset="-120"/>
               </a:rPr>
-              <a:t>4 / 15</a:t>
+              <a:t>4 / 17</a:t>
             </a:r>
             <a:endParaRPr lang="en-US" sz="1000" dirty="0"/>
           </a:p>
@@ -6179,7 +7159,7 @@
                 <a:ea typeface="微软雅黑" pitchFamily="34" charset="-122"/>
                 <a:cs typeface="微软雅黑" pitchFamily="34" charset="-120"/>
               </a:rPr>
-              <a:t>5 / 15</a:t>
+              <a:t>5 / 17</a:t>
             </a:r>
             <a:endParaRPr lang="en-US" sz="1000" dirty="0"/>
           </a:p>
@@ -6278,19 +7258,34 @@
             <a:avLst/>
           </a:prstGeom>
           <a:solidFill>
-            <a:srgbClr val="F5F6F7"/>
+            <a:srgbClr val="F7F9FC"/>
           </a:solidFill>
-          <a:ln w="9525">
-            <a:solidFill>
-              <a:srgbClr val="D8DBE0"/>
-            </a:solidFill>
-            <a:prstDash val="solid"/>
-          </a:ln>
-        </p:spPr>
-      </p:sp>
-      <p:sp>
-        <p:nvSpPr>
-          <p:cNvPr id="6" name="Text 4"/>
+          <a:ln/>
+        </p:spPr>
+      </p:sp>
+      <p:sp>
+        <p:nvSpPr>
+          <p:cNvPr id="6" name="Shape 4"/>
+          <p:cNvSpPr/>
+          <p:nvPr/>
+        </p:nvSpPr>
+        <p:spPr>
+          <a:xfrm>
+            <a:off x="822960" y="2395728"/>
+            <a:ext cx="50292" cy="795528"/>
+          </a:xfrm>
+          <a:prstGeom prst="rect">
+            <a:avLst/>
+          </a:prstGeom>
+          <a:solidFill>
+            <a:srgbClr val="1F4E9C"/>
+          </a:solidFill>
+          <a:ln/>
+        </p:spPr>
+      </p:sp>
+      <p:sp>
+        <p:nvSpPr>
+          <p:cNvPr id="7" name="Text 5"/>
           <p:cNvSpPr/>
           <p:nvPr/>
         </p:nvSpPr>
@@ -6333,7 +7328,7 @@
       </p:sp>
       <p:sp>
         <p:nvSpPr>
-          <p:cNvPr id="7" name="Text 5"/>
+          <p:cNvPr id="8" name="Text 6"/>
           <p:cNvSpPr/>
           <p:nvPr/>
         </p:nvSpPr>
@@ -6389,7 +7384,7 @@
       </p:sp>
       <p:sp>
         <p:nvSpPr>
-          <p:cNvPr id="8" name="Text 6"/>
+          <p:cNvPr id="9" name="Text 7"/>
           <p:cNvSpPr/>
           <p:nvPr/>
         </p:nvSpPr>
@@ -6445,7 +7440,7 @@
       </p:sp>
       <p:sp>
         <p:nvSpPr>
-          <p:cNvPr id="9" name="Text 7"/>
+          <p:cNvPr id="10" name="Text 8"/>
           <p:cNvSpPr/>
           <p:nvPr/>
         </p:nvSpPr>
@@ -6571,7 +7566,7 @@
                 <a:ea typeface="微软雅黑" pitchFamily="34" charset="-122"/>
                 <a:cs typeface="微软雅黑" pitchFamily="34" charset="-120"/>
               </a:rPr>
-              <a:t>6 / 15</a:t>
+              <a:t>6 / 17</a:t>
             </a:r>
             <a:endParaRPr lang="en-US" sz="1000" dirty="0"/>
           </a:p>
@@ -6670,19 +7665,34 @@
             <a:avLst/>
           </a:prstGeom>
           <a:solidFill>
-            <a:srgbClr val="F5F6F7"/>
+            <a:srgbClr val="F7F9FC"/>
           </a:solidFill>
-          <a:ln w="9525">
-            <a:solidFill>
-              <a:srgbClr val="D8DBE0"/>
-            </a:solidFill>
-            <a:prstDash val="solid"/>
-          </a:ln>
-        </p:spPr>
-      </p:sp>
-      <p:sp>
-        <p:nvSpPr>
-          <p:cNvPr id="6" name="Text 4"/>
+          <a:ln/>
+        </p:spPr>
+      </p:sp>
+      <p:sp>
+        <p:nvSpPr>
+          <p:cNvPr id="6" name="Shape 4"/>
+          <p:cNvSpPr/>
+          <p:nvPr/>
+        </p:nvSpPr>
+        <p:spPr>
+          <a:xfrm>
+            <a:off x="822960" y="2395728"/>
+            <a:ext cx="50292" cy="1746504"/>
+          </a:xfrm>
+          <a:prstGeom prst="rect">
+            <a:avLst/>
+          </a:prstGeom>
+          <a:solidFill>
+            <a:srgbClr val="1F4E9C"/>
+          </a:solidFill>
+          <a:ln/>
+        </p:spPr>
+      </p:sp>
+      <p:sp>
+        <p:nvSpPr>
+          <p:cNvPr id="7" name="Text 5"/>
           <p:cNvSpPr/>
           <p:nvPr/>
         </p:nvSpPr>
@@ -6729,7 +7739,7 @@
       </p:sp>
       <p:sp>
         <p:nvSpPr>
-          <p:cNvPr id="7" name="Text 5"/>
+          <p:cNvPr id="8" name="Text 6"/>
           <p:cNvSpPr/>
           <p:nvPr/>
         </p:nvSpPr>
@@ -6785,7 +7795,7 @@
       </p:sp>
       <p:sp>
         <p:nvSpPr>
-          <p:cNvPr id="8" name="Text 6"/>
+          <p:cNvPr id="9" name="Text 7"/>
           <p:cNvSpPr/>
           <p:nvPr/>
         </p:nvSpPr>
@@ -6841,7 +7851,7 @@
       </p:sp>
       <p:sp>
         <p:nvSpPr>
-          <p:cNvPr id="9" name="Text 7"/>
+          <p:cNvPr id="10" name="Text 8"/>
           <p:cNvSpPr/>
           <p:nvPr/>
         </p:nvSpPr>
@@ -6967,7 +7977,7 @@
                 <a:ea typeface="微软雅黑" pitchFamily="34" charset="-122"/>
                 <a:cs typeface="微软雅黑" pitchFamily="34" charset="-120"/>
               </a:rPr>
-              <a:t>7 / 15</a:t>
+              <a:t>7 / 17</a:t>
             </a:r>
             <a:endParaRPr lang="en-US" sz="1000" dirty="0"/>
           </a:p>
@@ -7066,19 +8076,34 @@
             <a:avLst/>
           </a:prstGeom>
           <a:solidFill>
-            <a:srgbClr val="F5F6F7"/>
+            <a:srgbClr val="F7F9FC"/>
           </a:solidFill>
-          <a:ln w="9525">
-            <a:solidFill>
-              <a:srgbClr val="D8DBE0"/>
-            </a:solidFill>
-            <a:prstDash val="solid"/>
-          </a:ln>
-        </p:spPr>
-      </p:sp>
-      <p:sp>
-        <p:nvSpPr>
-          <p:cNvPr id="6" name="Text 4"/>
+          <a:ln/>
+        </p:spPr>
+      </p:sp>
+      <p:sp>
+        <p:nvSpPr>
+          <p:cNvPr id="6" name="Shape 4"/>
+          <p:cNvSpPr/>
+          <p:nvPr/>
+        </p:nvSpPr>
+        <p:spPr>
+          <a:xfrm>
+            <a:off x="822960" y="2395728"/>
+            <a:ext cx="50292" cy="1271016"/>
+          </a:xfrm>
+          <a:prstGeom prst="rect">
+            <a:avLst/>
+          </a:prstGeom>
+          <a:solidFill>
+            <a:srgbClr val="1F4E9C"/>
+          </a:solidFill>
+          <a:ln/>
+        </p:spPr>
+      </p:sp>
+      <p:sp>
+        <p:nvSpPr>
+          <p:cNvPr id="7" name="Text 5"/>
           <p:cNvSpPr/>
           <p:nvPr/>
         </p:nvSpPr>
@@ -7123,7 +8148,7 @@
       </p:sp>
       <p:sp>
         <p:nvSpPr>
-          <p:cNvPr id="7" name="Text 5"/>
+          <p:cNvPr id="8" name="Text 6"/>
           <p:cNvSpPr/>
           <p:nvPr/>
         </p:nvSpPr>
@@ -7179,7 +8204,7 @@
       </p:sp>
       <p:sp>
         <p:nvSpPr>
-          <p:cNvPr id="8" name="Text 6"/>
+          <p:cNvPr id="9" name="Text 7"/>
           <p:cNvSpPr/>
           <p:nvPr/>
         </p:nvSpPr>
@@ -7235,7 +8260,7 @@
       </p:sp>
       <p:sp>
         <p:nvSpPr>
-          <p:cNvPr id="9" name="Text 7"/>
+          <p:cNvPr id="10" name="Text 8"/>
           <p:cNvSpPr/>
           <p:nvPr/>
         </p:nvSpPr>
@@ -7361,7 +8386,7 @@
                 <a:ea typeface="微软雅黑" pitchFamily="34" charset="-122"/>
                 <a:cs typeface="微软雅黑" pitchFamily="34" charset="-120"/>
               </a:rPr>
-              <a:t>8 / 15</a:t>
+              <a:t>8 / 17</a:t>
             </a:r>
             <a:endParaRPr lang="en-US" sz="1000" dirty="0"/>
           </a:p>
@@ -7400,7 +8425,7 @@
                 <a:ea typeface="微软雅黑" pitchFamily="34" charset="-122"/>
                 <a:cs typeface="微软雅黑" pitchFamily="34" charset="-120"/>
               </a:rPr>
-              <a:t>板书推演</a:t>
+              <a:t>动画演示 · 内存三区图（本页逐条动画出现）</a:t>
             </a:r>
             <a:endParaRPr lang="en-US" sz="1400" dirty="0"/>
           </a:p>
@@ -7439,7 +8464,7 @@
                 <a:ea typeface="微软雅黑" pitchFamily="34" charset="-122"/>
                 <a:cs typeface="微软雅黑" pitchFamily="34" charset="-120"/>
               </a:rPr>
-              <a:t>画内存三区与一次malloc</a:t>
+              <a:t>内存三区与一次malloc的真相（不手写，跟着画）</a:t>
             </a:r>
             <a:endParaRPr lang="en-US" sz="2800" dirty="0"/>
           </a:p>
@@ -7453,8 +8478,8 @@
         </p:nvSpPr>
         <p:spPr>
           <a:xfrm>
-            <a:off x="822960" y="2194560"/>
-            <a:ext cx="10545775" cy="685800"/>
+            <a:off x="896112" y="2395728"/>
+            <a:ext cx="10454335" cy="397764"/>
           </a:xfrm>
           <a:prstGeom prst="rect">
             <a:avLst/>
@@ -7467,47 +8492,95 @@
           <a:lstStyle/>
           <a:p>
             <a:pPr algn="l" indent="0" marL="0">
-              <a:buNone/>
-            </a:pPr>
-            <a:r>
-              <a:rPr lang="en-US" sz="1600" dirty="0">
-                <a:solidFill>
-                  <a:srgbClr val="1F2329"/>
-                </a:solidFill>
-                <a:latin typeface="微软雅黑" pitchFamily="34" charset="0"/>
-                <a:ea typeface="微软雅黑" pitchFamily="34" charset="-122"/>
-                <a:cs typeface="微软雅黑" pitchFamily="34" charset="-120"/>
-              </a:rPr>
-              <a:t>任务：① 竖着画三个区域，标静态区、栈、堆；② 栈上画局部变量p的格子；③ 堆上画一片四格，标malloc要到的地方；④ 从p画箭头指向堆上的格子。只画区域、格子与箭头，不写程序骨架</a:t>
-            </a:r>
-            <a:endParaRPr lang="en-US" sz="1600" dirty="0"/>
-          </a:p>
-        </p:txBody>
-      </p:sp>
-      <p:sp>
-        <p:nvSpPr>
-          <p:cNvPr id="6" name="Shape 4"/>
-          <p:cNvSpPr/>
-          <p:nvPr/>
-        </p:nvSpPr>
-        <p:spPr>
-          <a:xfrm>
-            <a:off x="822960" y="3017520"/>
-            <a:ext cx="10545775" cy="2788920"/>
-          </a:xfrm>
-          <a:prstGeom prst="rect">
-            <a:avLst/>
-          </a:prstGeom>
-          <a:solidFill>
-            <a:srgbClr val="FFFFFF"/>
-          </a:solidFill>
-          <a:ln w="12700">
-            <a:solidFill>
-              <a:srgbClr val="B9C0C9"/>
-            </a:solidFill>
-            <a:prstDash val="dash"/>
-          </a:ln>
-        </p:spPr>
+              <a:lnSpc>
+                <a:spcPct val="115000"/>
+              </a:lnSpc>
+              <a:buNone/>
+            </a:pPr>
+            <a:r>
+              <a:rPr lang="en-US" sz="1800" b="1" dirty="0">
+                <a:solidFill>
+                  <a:srgbClr val="1F4E9C"/>
+                </a:solidFill>
+                <a:latin typeface="微软雅黑" pitchFamily="34" charset="0"/>
+                <a:ea typeface="微软雅黑" pitchFamily="34" charset="-122"/>
+                <a:cs typeface="微软雅黑" pitchFamily="34" charset="-120"/>
+              </a:rPr>
+              <a:t>•  </a:t>
+            </a:r>
+            <a:pPr algn="l" indent="0" marL="0">
+              <a:lnSpc>
+                <a:spcPct val="115000"/>
+              </a:lnSpc>
+              <a:buNone/>
+            </a:pPr>
+            <a:r>
+              <a:rPr lang="en-US" sz="1800" dirty="0">
+                <a:solidFill>
+                  <a:srgbClr val="000000"/>
+                </a:solidFill>
+              </a:rPr>
+              <a:t>① 竖着分三区：静态区（小）、栈（中）、堆（大），同一块内存划出来的三个区域</a:t>
+            </a:r>
+            <a:endParaRPr lang="en-US" sz="1800" dirty="0"/>
+          </a:p>
+        </p:txBody>
+      </p:sp>
+      <p:sp>
+        <p:nvSpPr>
+          <p:cNvPr id="6" name="Text 4"/>
+          <p:cNvSpPr/>
+          <p:nvPr/>
+        </p:nvSpPr>
+        <p:spPr>
+          <a:xfrm>
+            <a:off x="896112" y="2866644"/>
+            <a:ext cx="10454335" cy="397764"/>
+          </a:xfrm>
+          <a:prstGeom prst="rect">
+            <a:avLst/>
+          </a:prstGeom>
+          <a:noFill/>
+          <a:ln/>
+        </p:spPr>
+        <p:txBody>
+          <a:bodyPr wrap="square" rtlCol="0" anchor="t"/>
+          <a:lstStyle/>
+          <a:p>
+            <a:pPr algn="l" indent="0" marL="0">
+              <a:lnSpc>
+                <a:spcPct val="115000"/>
+              </a:lnSpc>
+              <a:buNone/>
+            </a:pPr>
+            <a:r>
+              <a:rPr lang="en-US" sz="1800" b="1" dirty="0">
+                <a:solidFill>
+                  <a:srgbClr val="1F4E9C"/>
+                </a:solidFill>
+                <a:latin typeface="微软雅黑" pitchFamily="34" charset="0"/>
+                <a:ea typeface="微软雅黑" pitchFamily="34" charset="-122"/>
+                <a:cs typeface="微软雅黑" pitchFamily="34" charset="-120"/>
+              </a:rPr>
+              <a:t>•  </a:t>
+            </a:r>
+            <a:pPr algn="l" indent="0" marL="0">
+              <a:lnSpc>
+                <a:spcPct val="115000"/>
+              </a:lnSpc>
+              <a:buNone/>
+            </a:pPr>
+            <a:r>
+              <a:rPr lang="en-US" sz="1800" dirty="0">
+                <a:solidFill>
+                  <a:srgbClr val="000000"/>
+                </a:solidFill>
+              </a:rPr>
+              <a:t>② 栈区画格子p：局部变量是栈上的格子（初学者最常画错的位置）</a:t>
+            </a:r>
+            <a:endParaRPr lang="en-US" sz="1800" dirty="0"/>
+          </a:p>
+        </p:txBody>
       </p:sp>
       <p:sp>
         <p:nvSpPr>
@@ -7517,34 +8590,107 @@
         </p:nvSpPr>
         <p:spPr>
           <a:xfrm>
-            <a:off x="822960" y="5349240"/>
-            <a:ext cx="10545775" cy="365760"/>
-          </a:xfrm>
-          <a:prstGeom prst="rect">
-            <a:avLst/>
-          </a:prstGeom>
-          <a:noFill/>
-          <a:ln/>
-        </p:spPr>
-        <p:txBody>
-          <a:bodyPr wrap="square" rtlCol="0" anchor="ctr"/>
-          <a:lstStyle/>
-          <a:p>
-            <a:pPr algn="r" indent="0" marL="0">
-              <a:buNone/>
-            </a:pPr>
-            <a:r>
-              <a:rPr lang="en-US" sz="1200" dirty="0">
-                <a:solidFill>
-                  <a:srgbClr val="8A9099"/>
-                </a:solidFill>
-                <a:latin typeface="微软雅黑" pitchFamily="34" charset="0"/>
-                <a:ea typeface="微软雅黑" pitchFamily="34" charset="-122"/>
-                <a:cs typeface="微软雅黑" pitchFamily="34" charset="-120"/>
-              </a:rPr>
-              <a:t>此处板书推演</a:t>
-            </a:r>
-            <a:endParaRPr lang="en-US" sz="1200" dirty="0"/>
+            <a:off x="896112" y="3337560"/>
+            <a:ext cx="10454335" cy="397764"/>
+          </a:xfrm>
+          <a:prstGeom prst="rect">
+            <a:avLst/>
+          </a:prstGeom>
+          <a:noFill/>
+          <a:ln/>
+        </p:spPr>
+        <p:txBody>
+          <a:bodyPr wrap="square" rtlCol="0" anchor="t"/>
+          <a:lstStyle/>
+          <a:p>
+            <a:pPr algn="l" indent="0" marL="0">
+              <a:lnSpc>
+                <a:spcPct val="115000"/>
+              </a:lnSpc>
+              <a:buNone/>
+            </a:pPr>
+            <a:r>
+              <a:rPr lang="en-US" sz="1800" b="1" dirty="0">
+                <a:solidFill>
+                  <a:srgbClr val="1F4E9C"/>
+                </a:solidFill>
+                <a:latin typeface="微软雅黑" pitchFamily="34" charset="0"/>
+                <a:ea typeface="微软雅黑" pitchFamily="34" charset="-122"/>
+                <a:cs typeface="微软雅黑" pitchFamily="34" charset="-120"/>
+              </a:rPr>
+              <a:t>•  </a:t>
+            </a:r>
+            <a:pPr algn="l" indent="0" marL="0">
+              <a:lnSpc>
+                <a:spcPct val="115000"/>
+              </a:lnSpc>
+              <a:buNone/>
+            </a:pPr>
+            <a:r>
+              <a:rPr lang="en-US" sz="1800" dirty="0">
+                <a:solidFill>
+                  <a:srgbClr val="000000"/>
+                </a:solidFill>
+              </a:rPr>
+              <a:t>③ 堆区画四格：标"malloc要到的地方"，这片格子没有名字，只有地址</a:t>
+            </a:r>
+            <a:endParaRPr lang="en-US" sz="1800" dirty="0"/>
+          </a:p>
+        </p:txBody>
+      </p:sp>
+      <p:sp>
+        <p:nvSpPr>
+          <p:cNvPr id="8" name="Text 6"/>
+          <p:cNvSpPr/>
+          <p:nvPr/>
+        </p:nvSpPr>
+        <p:spPr>
+          <a:xfrm>
+            <a:off x="896112" y="3808476"/>
+            <a:ext cx="10454335" cy="397764"/>
+          </a:xfrm>
+          <a:prstGeom prst="rect">
+            <a:avLst/>
+          </a:prstGeom>
+          <a:noFill/>
+          <a:ln/>
+        </p:spPr>
+        <p:txBody>
+          <a:bodyPr wrap="square" rtlCol="0" anchor="t"/>
+          <a:lstStyle/>
+          <a:p>
+            <a:pPr algn="l" indent="0" marL="0">
+              <a:lnSpc>
+                <a:spcPct val="115000"/>
+              </a:lnSpc>
+              <a:buNone/>
+            </a:pPr>
+            <a:r>
+              <a:rPr lang="en-US" sz="1800" b="1" dirty="0">
+                <a:solidFill>
+                  <a:srgbClr val="1F4E9C"/>
+                </a:solidFill>
+                <a:latin typeface="微软雅黑" pitchFamily="34" charset="0"/>
+                <a:ea typeface="微软雅黑" pitchFamily="34" charset="-122"/>
+                <a:cs typeface="微软雅黑" pitchFamily="34" charset="-120"/>
+              </a:rPr>
+              <a:t>•  </a:t>
+            </a:r>
+            <a:pPr algn="l" indent="0" marL="0">
+              <a:lnSpc>
+                <a:spcPct val="115000"/>
+              </a:lnSpc>
+              <a:buNone/>
+            </a:pPr>
+            <a:r>
+              <a:rPr lang="en-US" sz="1800" dirty="0">
+                <a:solidFill>
+                  <a:srgbClr val="000000"/>
+                </a:solidFill>
+              </a:rPr>
+              <a:t>④ 从p画箭头穿过两区指到堆上格子：栈上住指针，堆上住数据，一根箭头连两头</a:t>
+            </a:r>
+            <a:endParaRPr lang="en-US" sz="1800" dirty="0"/>
           </a:p>
         </p:txBody>
       </p:sp>
@@ -7620,7 +8766,7 @@
                 <a:ea typeface="微软雅黑" pitchFamily="34" charset="-122"/>
                 <a:cs typeface="微软雅黑" pitchFamily="34" charset="-120"/>
               </a:rPr>
-              <a:t>9 / 15</a:t>
+              <a:t>9 / 17</a:t>
             </a:r>
             <a:endParaRPr lang="en-US" sz="1000" dirty="0"/>
           </a:p>
@@ -7719,19 +8865,34 @@
             <a:avLst/>
           </a:prstGeom>
           <a:solidFill>
-            <a:srgbClr val="F5F6F7"/>
+            <a:srgbClr val="F7F9FC"/>
           </a:solidFill>
-          <a:ln w="9525">
-            <a:solidFill>
-              <a:srgbClr val="D8DBE0"/>
-            </a:solidFill>
-            <a:prstDash val="solid"/>
-          </a:ln>
-        </p:spPr>
-      </p:sp>
-      <p:sp>
-        <p:nvSpPr>
-          <p:cNvPr id="6" name="Text 4"/>
+          <a:ln/>
+        </p:spPr>
+      </p:sp>
+      <p:sp>
+        <p:nvSpPr>
+          <p:cNvPr id="6" name="Shape 4"/>
+          <p:cNvSpPr/>
+          <p:nvPr/>
+        </p:nvSpPr>
+        <p:spPr>
+          <a:xfrm>
+            <a:off x="822960" y="2395728"/>
+            <a:ext cx="50292" cy="1033272"/>
+          </a:xfrm>
+          <a:prstGeom prst="rect">
+            <a:avLst/>
+          </a:prstGeom>
+          <a:solidFill>
+            <a:srgbClr val="1F4E9C"/>
+          </a:solidFill>
+          <a:ln/>
+        </p:spPr>
+      </p:sp>
+      <p:sp>
+        <p:nvSpPr>
+          <p:cNvPr id="7" name="Text 5"/>
           <p:cNvSpPr/>
           <p:nvPr/>
         </p:nvSpPr>
@@ -7775,7 +8936,7 @@
       </p:sp>
       <p:sp>
         <p:nvSpPr>
-          <p:cNvPr id="7" name="Text 5"/>
+          <p:cNvPr id="8" name="Text 6"/>
           <p:cNvSpPr/>
           <p:nvPr/>
         </p:nvSpPr>
@@ -7845,7 +9006,7 @@
       </p:sp>
       <p:sp>
         <p:nvSpPr>
-          <p:cNvPr id="8" name="Text 6"/>
+          <p:cNvPr id="9" name="Text 7"/>
           <p:cNvSpPr/>
           <p:nvPr/>
         </p:nvSpPr>
@@ -7901,7 +9062,7 @@
       </p:sp>
       <p:sp>
         <p:nvSpPr>
-          <p:cNvPr id="9" name="Text 7"/>
+          <p:cNvPr id="10" name="Text 8"/>
           <p:cNvSpPr/>
           <p:nvPr/>
         </p:nvSpPr>

--- a/课件/C1/C1-B-04/C1-B-04.pptx
+++ b/课件/C1/C1-B-04/C1-B-04.pptx
@@ -8016,7 +8016,7 @@
                 <a:ea typeface="微软雅黑" pitchFamily="34" charset="-122"/>
                 <a:cs typeface="微软雅黑" pitchFamily="34" charset="-120"/>
               </a:rPr>
-              <a:t>要一整片</a:t>
+              <a:t>内存三区推演</a:t>
             </a:r>
             <a:endParaRPr lang="en-US" sz="1400" dirty="0"/>
           </a:p>
@@ -8055,7 +8055,7 @@
                 <a:ea typeface="微软雅黑" pitchFamily="34" charset="-122"/>
                 <a:cs typeface="微软雅黑" pitchFamily="34" charset="-120"/>
               </a:rPr>
-              <a:t>malloc一片数组：sizeof算字节，指针当数组用</a:t>
+              <a:t>内存三区与一次malloc（拿纸跟着画）</a:t>
             </a:r>
             <a:endParaRPr lang="en-US" sz="2800" dirty="0"/>
           </a:p>
@@ -8063,43 +8063,115 @@
       </p:sp>
       <p:sp>
         <p:nvSpPr>
-          <p:cNvPr id="5" name="Shape 3"/>
-          <p:cNvSpPr/>
-          <p:nvPr/>
-        </p:nvSpPr>
-        <p:spPr>
-          <a:xfrm>
-            <a:off x="822960" y="2395728"/>
-            <a:ext cx="10545775" cy="1271016"/>
-          </a:xfrm>
-          <a:prstGeom prst="rect">
-            <a:avLst/>
-          </a:prstGeom>
-          <a:solidFill>
-            <a:srgbClr val="F7F9FC"/>
-          </a:solidFill>
-          <a:ln/>
-        </p:spPr>
-      </p:sp>
-      <p:sp>
-        <p:nvSpPr>
-          <p:cNvPr id="6" name="Shape 4"/>
-          <p:cNvSpPr/>
-          <p:nvPr/>
-        </p:nvSpPr>
-        <p:spPr>
-          <a:xfrm>
-            <a:off x="822960" y="2395728"/>
-            <a:ext cx="50292" cy="1271016"/>
-          </a:xfrm>
-          <a:prstGeom prst="rect">
-            <a:avLst/>
-          </a:prstGeom>
-          <a:solidFill>
-            <a:srgbClr val="1F4E9C"/>
-          </a:solidFill>
-          <a:ln/>
-        </p:spPr>
+          <p:cNvPr id="5" name="Text 3"/>
+          <p:cNvSpPr/>
+          <p:nvPr/>
+        </p:nvSpPr>
+        <p:spPr>
+          <a:xfrm>
+            <a:off x="896112" y="2395728"/>
+            <a:ext cx="10454335" cy="397764"/>
+          </a:xfrm>
+          <a:prstGeom prst="rect">
+            <a:avLst/>
+          </a:prstGeom>
+          <a:noFill/>
+          <a:ln/>
+        </p:spPr>
+        <p:txBody>
+          <a:bodyPr wrap="square" rtlCol="0" anchor="t"/>
+          <a:lstStyle/>
+          <a:p>
+            <a:pPr algn="l" indent="0" marL="0">
+              <a:lnSpc>
+                <a:spcPct val="115000"/>
+              </a:lnSpc>
+              <a:buNone/>
+            </a:pPr>
+            <a:r>
+              <a:rPr lang="en-US" sz="1800" b="1" dirty="0">
+                <a:solidFill>
+                  <a:srgbClr val="1F4E9C"/>
+                </a:solidFill>
+                <a:latin typeface="微软雅黑" pitchFamily="34" charset="0"/>
+                <a:ea typeface="微软雅黑" pitchFamily="34" charset="-122"/>
+                <a:cs typeface="微软雅黑" pitchFamily="34" charset="-120"/>
+              </a:rPr>
+              <a:t>•  </a:t>
+            </a:r>
+            <a:pPr algn="l" indent="0" marL="0">
+              <a:lnSpc>
+                <a:spcPct val="115000"/>
+              </a:lnSpc>
+              <a:buNone/>
+            </a:pPr>
+            <a:r>
+              <a:rPr lang="en-US" sz="1800" dirty="0">
+                <a:solidFill>
+                  <a:srgbClr val="000000"/>
+                </a:solidFill>
+              </a:rPr>
+              <a:t>① 竖着分三区：静态区（小）、栈（中）、堆（大），同一块内存划出来的三个区域</a:t>
+            </a:r>
+            <a:endParaRPr lang="en-US" sz="1800" dirty="0"/>
+          </a:p>
+        </p:txBody>
+      </p:sp>
+      <p:sp>
+        <p:nvSpPr>
+          <p:cNvPr id="6" name="Text 4"/>
+          <p:cNvSpPr/>
+          <p:nvPr/>
+        </p:nvSpPr>
+        <p:spPr>
+          <a:xfrm>
+            <a:off x="896112" y="2866644"/>
+            <a:ext cx="10454335" cy="397764"/>
+          </a:xfrm>
+          <a:prstGeom prst="rect">
+            <a:avLst/>
+          </a:prstGeom>
+          <a:noFill/>
+          <a:ln/>
+        </p:spPr>
+        <p:txBody>
+          <a:bodyPr wrap="square" rtlCol="0" anchor="t"/>
+          <a:lstStyle/>
+          <a:p>
+            <a:pPr algn="l" indent="0" marL="0">
+              <a:lnSpc>
+                <a:spcPct val="115000"/>
+              </a:lnSpc>
+              <a:buNone/>
+            </a:pPr>
+            <a:r>
+              <a:rPr lang="en-US" sz="1800" b="1" dirty="0">
+                <a:solidFill>
+                  <a:srgbClr val="1F4E9C"/>
+                </a:solidFill>
+                <a:latin typeface="微软雅黑" pitchFamily="34" charset="0"/>
+                <a:ea typeface="微软雅黑" pitchFamily="34" charset="-122"/>
+                <a:cs typeface="微软雅黑" pitchFamily="34" charset="-120"/>
+              </a:rPr>
+              <a:t>•  </a:t>
+            </a:r>
+            <a:pPr algn="l" indent="0" marL="0">
+              <a:lnSpc>
+                <a:spcPct val="115000"/>
+              </a:lnSpc>
+              <a:buNone/>
+            </a:pPr>
+            <a:r>
+              <a:rPr lang="en-US" sz="1800" dirty="0">
+                <a:solidFill>
+                  <a:srgbClr val="000000"/>
+                </a:solidFill>
+              </a:rPr>
+              <a:t>② 栈区画格子p：局部变量是栈上的格子（初学者最常画错的位置）</a:t>
+            </a:r>
+            <a:endParaRPr lang="en-US" sz="1800" dirty="0"/>
+          </a:p>
+        </p:txBody>
       </p:sp>
       <p:sp>
         <p:nvSpPr>
@@ -8109,8 +8181,8 @@
         </p:nvSpPr>
         <p:spPr>
           <a:xfrm>
-            <a:off x="1078992" y="2505456"/>
-            <a:ext cx="10033711" cy="1051560"/>
+            <a:off x="896112" y="3337560"/>
+            <a:ext cx="10454335" cy="397764"/>
           </a:xfrm>
           <a:prstGeom prst="rect">
             <a:avLst/>
@@ -8124,25 +8196,36 @@
           <a:p>
             <a:pPr algn="l" indent="0" marL="0">
               <a:lnSpc>
-                <a:spcPct val="125000"/>
-              </a:lnSpc>
-              <a:buNone/>
-            </a:pPr>
-            <a:r>
-              <a:rPr lang="en-US" sz="1400" dirty="0">
-                <a:solidFill>
-                  <a:srgbClr val="1F2329"/>
-                </a:solidFill>
-                <a:latin typeface="Consolas" pitchFamily="34" charset="0"/>
-                <a:ea typeface="Consolas" pitchFamily="34" charset="-122"/>
-                <a:cs typeface="Consolas" pitchFamily="34" charset="-120"/>
-              </a:rPr>
-              <a:t>int n = 5;
-int *arr = (int *)malloc(sizeof(int) * n);
-arr[0] = 10;          // 像数组一样用
-</a:t>
-            </a:r>
-            <a:endParaRPr lang="en-US" sz="1400" dirty="0"/>
+                <a:spcPct val="115000"/>
+              </a:lnSpc>
+              <a:buNone/>
+            </a:pPr>
+            <a:r>
+              <a:rPr lang="en-US" sz="1800" b="1" dirty="0">
+                <a:solidFill>
+                  <a:srgbClr val="1F4E9C"/>
+                </a:solidFill>
+                <a:latin typeface="微软雅黑" pitchFamily="34" charset="0"/>
+                <a:ea typeface="微软雅黑" pitchFamily="34" charset="-122"/>
+                <a:cs typeface="微软雅黑" pitchFamily="34" charset="-120"/>
+              </a:rPr>
+              <a:t>•  </a:t>
+            </a:r>
+            <a:pPr algn="l" indent="0" marL="0">
+              <a:lnSpc>
+                <a:spcPct val="115000"/>
+              </a:lnSpc>
+              <a:buNone/>
+            </a:pPr>
+            <a:r>
+              <a:rPr lang="en-US" sz="1800" dirty="0">
+                <a:solidFill>
+                  <a:srgbClr val="000000"/>
+                </a:solidFill>
+              </a:rPr>
+              <a:t>③ 堆区画四格：标"malloc要到的地方"，这片格子没有名字，只有地址</a:t>
+            </a:r>
+            <a:endParaRPr lang="en-US" sz="1800" dirty="0"/>
           </a:p>
         </p:txBody>
       </p:sp>
@@ -8154,7 +8237,7 @@
         </p:nvSpPr>
         <p:spPr>
           <a:xfrm>
-            <a:off x="896112" y="3867912"/>
+            <a:off x="896112" y="3808476"/>
             <a:ext cx="10454335" cy="397764"/>
           </a:xfrm>
           <a:prstGeom prst="rect">
@@ -8196,119 +8279,7 @@
                   <a:srgbClr val="000000"/>
                 </a:solidFill>
               </a:rPr>
-              <a:t>malloc要的是字节数：n个int就是sizeof(int)乘n</a:t>
-            </a:r>
-            <a:endParaRPr lang="en-US" sz="1800" dirty="0"/>
-          </a:p>
-        </p:txBody>
-      </p:sp>
-      <p:sp>
-        <p:nvSpPr>
-          <p:cNvPr id="9" name="Text 7"/>
-          <p:cNvSpPr/>
-          <p:nvPr/>
-        </p:nvSpPr>
-        <p:spPr>
-          <a:xfrm>
-            <a:off x="896112" y="4338828"/>
-            <a:ext cx="10454335" cy="397764"/>
-          </a:xfrm>
-          <a:prstGeom prst="rect">
-            <a:avLst/>
-          </a:prstGeom>
-          <a:noFill/>
-          <a:ln/>
-        </p:spPr>
-        <p:txBody>
-          <a:bodyPr wrap="square" rtlCol="0" anchor="t"/>
-          <a:lstStyle/>
-          <a:p>
-            <a:pPr algn="l" indent="0" marL="0">
-              <a:lnSpc>
-                <a:spcPct val="115000"/>
-              </a:lnSpc>
-              <a:buNone/>
-            </a:pPr>
-            <a:r>
-              <a:rPr lang="en-US" sz="1800" b="1" dirty="0">
-                <a:solidFill>
-                  <a:srgbClr val="1F4E9C"/>
-                </a:solidFill>
-                <a:latin typeface="微软雅黑" pitchFamily="34" charset="0"/>
-                <a:ea typeface="微软雅黑" pitchFamily="34" charset="-122"/>
-                <a:cs typeface="微软雅黑" pitchFamily="34" charset="-120"/>
-              </a:rPr>
-              <a:t>•  </a:t>
-            </a:r>
-            <a:pPr algn="l" indent="0" marL="0">
-              <a:lnSpc>
-                <a:spcPct val="115000"/>
-              </a:lnSpc>
-              <a:buNone/>
-            </a:pPr>
-            <a:r>
-              <a:rPr lang="en-US" sz="1800" dirty="0">
-                <a:solidFill>
-                  <a:srgbClr val="000000"/>
-                </a:solidFill>
-              </a:rPr>
-              <a:t>要到的是一片连续的格子，上节课的数组规律原样适用</a:t>
-            </a:r>
-            <a:endParaRPr lang="en-US" sz="1800" dirty="0"/>
-          </a:p>
-        </p:txBody>
-      </p:sp>
-      <p:sp>
-        <p:nvSpPr>
-          <p:cNvPr id="10" name="Text 8"/>
-          <p:cNvSpPr/>
-          <p:nvPr/>
-        </p:nvSpPr>
-        <p:spPr>
-          <a:xfrm>
-            <a:off x="896112" y="4809744"/>
-            <a:ext cx="10454335" cy="397764"/>
-          </a:xfrm>
-          <a:prstGeom prst="rect">
-            <a:avLst/>
-          </a:prstGeom>
-          <a:noFill/>
-          <a:ln/>
-        </p:spPr>
-        <p:txBody>
-          <a:bodyPr wrap="square" rtlCol="0" anchor="t"/>
-          <a:lstStyle/>
-          <a:p>
-            <a:pPr algn="l" indent="0" marL="0">
-              <a:lnSpc>
-                <a:spcPct val="115000"/>
-              </a:lnSpc>
-              <a:buNone/>
-            </a:pPr>
-            <a:r>
-              <a:rPr lang="en-US" sz="1800" b="1" dirty="0">
-                <a:solidFill>
-                  <a:srgbClr val="1F4E9C"/>
-                </a:solidFill>
-                <a:latin typeface="微软雅黑" pitchFamily="34" charset="0"/>
-                <a:ea typeface="微软雅黑" pitchFamily="34" charset="-122"/>
-                <a:cs typeface="微软雅黑" pitchFamily="34" charset="-120"/>
-              </a:rPr>
-              <a:t>•  </a:t>
-            </a:r>
-            <a:pPr algn="l" indent="0" marL="0">
-              <a:lnSpc>
-                <a:spcPct val="115000"/>
-              </a:lnSpc>
-              <a:buNone/>
-            </a:pPr>
-            <a:r>
-              <a:rPr lang="en-US" sz="1800" dirty="0">
-                <a:solidFill>
-                  <a:srgbClr val="000000"/>
-                </a:solidFill>
-              </a:rPr>
-              <a:t>arr[i]就是*(arr+i)：指针当数组名用，下标照样使</a:t>
+              <a:t>④ 从p画箭头穿过两区指到堆上格子：栈上住指针，堆上住数据，一根箭头连两头</a:t>
             </a:r>
             <a:endParaRPr lang="en-US" sz="1800" dirty="0"/>
           </a:p>
@@ -8425,7 +8396,7 @@
                 <a:ea typeface="微软雅黑" pitchFamily="34" charset="-122"/>
                 <a:cs typeface="微软雅黑" pitchFamily="34" charset="-120"/>
               </a:rPr>
-              <a:t>动画演示 · 内存三区图（本页逐条动画出现）</a:t>
+              <a:t>要一整片</a:t>
             </a:r>
             <a:endParaRPr lang="en-US" sz="1400" dirty="0"/>
           </a:p>
@@ -8464,7 +8435,7 @@
                 <a:ea typeface="微软雅黑" pitchFamily="34" charset="-122"/>
                 <a:cs typeface="微软雅黑" pitchFamily="34" charset="-120"/>
               </a:rPr>
-              <a:t>内存三区与一次malloc的真相（不手写，跟着画）</a:t>
+              <a:t>malloc一片数组：sizeof算字节，指针当数组用</a:t>
             </a:r>
             <a:endParaRPr lang="en-US" sz="2800" dirty="0"/>
           </a:p>
@@ -8472,13 +8443,98 @@
       </p:sp>
       <p:sp>
         <p:nvSpPr>
-          <p:cNvPr id="5" name="Text 3"/>
-          <p:cNvSpPr/>
-          <p:nvPr/>
-        </p:nvSpPr>
-        <p:spPr>
-          <a:xfrm>
-            <a:off x="896112" y="2395728"/>
+          <p:cNvPr id="5" name="Shape 3"/>
+          <p:cNvSpPr/>
+          <p:nvPr/>
+        </p:nvSpPr>
+        <p:spPr>
+          <a:xfrm>
+            <a:off x="822960" y="2395728"/>
+            <a:ext cx="10545775" cy="1271016"/>
+          </a:xfrm>
+          <a:prstGeom prst="rect">
+            <a:avLst/>
+          </a:prstGeom>
+          <a:solidFill>
+            <a:srgbClr val="F7F9FC"/>
+          </a:solidFill>
+          <a:ln/>
+        </p:spPr>
+      </p:sp>
+      <p:sp>
+        <p:nvSpPr>
+          <p:cNvPr id="6" name="Shape 4"/>
+          <p:cNvSpPr/>
+          <p:nvPr/>
+        </p:nvSpPr>
+        <p:spPr>
+          <a:xfrm>
+            <a:off x="822960" y="2395728"/>
+            <a:ext cx="50292" cy="1271016"/>
+          </a:xfrm>
+          <a:prstGeom prst="rect">
+            <a:avLst/>
+          </a:prstGeom>
+          <a:solidFill>
+            <a:srgbClr val="1F4E9C"/>
+          </a:solidFill>
+          <a:ln/>
+        </p:spPr>
+      </p:sp>
+      <p:sp>
+        <p:nvSpPr>
+          <p:cNvPr id="7" name="Text 5"/>
+          <p:cNvSpPr/>
+          <p:nvPr/>
+        </p:nvSpPr>
+        <p:spPr>
+          <a:xfrm>
+            <a:off x="1078992" y="2505456"/>
+            <a:ext cx="10033711" cy="1051560"/>
+          </a:xfrm>
+          <a:prstGeom prst="rect">
+            <a:avLst/>
+          </a:prstGeom>
+          <a:noFill/>
+          <a:ln/>
+        </p:spPr>
+        <p:txBody>
+          <a:bodyPr wrap="square" rtlCol="0" anchor="t"/>
+          <a:lstStyle/>
+          <a:p>
+            <a:pPr algn="l" indent="0" marL="0">
+              <a:lnSpc>
+                <a:spcPct val="125000"/>
+              </a:lnSpc>
+              <a:buNone/>
+            </a:pPr>
+            <a:r>
+              <a:rPr lang="en-US" sz="1400" dirty="0">
+                <a:solidFill>
+                  <a:srgbClr val="1F2329"/>
+                </a:solidFill>
+                <a:latin typeface="Consolas" pitchFamily="34" charset="0"/>
+                <a:ea typeface="Consolas" pitchFamily="34" charset="-122"/>
+                <a:cs typeface="Consolas" pitchFamily="34" charset="-120"/>
+              </a:rPr>
+              <a:t>int n = 5;
+int *arr = (int *)malloc(sizeof(int) * n);
+arr[0] = 10;          // 像数组一样用
+</a:t>
+            </a:r>
+            <a:endParaRPr lang="en-US" sz="1400" dirty="0"/>
+          </a:p>
+        </p:txBody>
+      </p:sp>
+      <p:sp>
+        <p:nvSpPr>
+          <p:cNvPr id="8" name="Text 6"/>
+          <p:cNvSpPr/>
+          <p:nvPr/>
+        </p:nvSpPr>
+        <p:spPr>
+          <a:xfrm>
+            <a:off x="896112" y="3867912"/>
             <a:ext cx="10454335" cy="397764"/>
           </a:xfrm>
           <a:prstGeom prst="rect">
@@ -8520,7 +8576,7 @@
                   <a:srgbClr val="000000"/>
                 </a:solidFill>
               </a:rPr>
-              <a:t>① 竖着分三区：静态区（小）、栈（中）、堆（大），同一块内存划出来的三个区域</a:t>
+              <a:t>malloc要的是字节数：n个int就是sizeof(int)乘n</a:t>
             </a:r>
             <a:endParaRPr lang="en-US" sz="1800" dirty="0"/>
           </a:p>
@@ -8528,13 +8584,13 @@
       </p:sp>
       <p:sp>
         <p:nvSpPr>
-          <p:cNvPr id="6" name="Text 4"/>
-          <p:cNvSpPr/>
-          <p:nvPr/>
-        </p:nvSpPr>
-        <p:spPr>
-          <a:xfrm>
-            <a:off x="896112" y="2866644"/>
+          <p:cNvPr id="9" name="Text 7"/>
+          <p:cNvSpPr/>
+          <p:nvPr/>
+        </p:nvSpPr>
+        <p:spPr>
+          <a:xfrm>
+            <a:off x="896112" y="4338828"/>
             <a:ext cx="10454335" cy="397764"/>
           </a:xfrm>
           <a:prstGeom prst="rect">
@@ -8576,7 +8632,7 @@
                   <a:srgbClr val="000000"/>
                 </a:solidFill>
               </a:rPr>
-              <a:t>② 栈区画格子p：局部变量是栈上的格子（初学者最常画错的位置）</a:t>
+              <a:t>要到的是一片连续的格子，前面学的数组规律原样适用</a:t>
             </a:r>
             <a:endParaRPr lang="en-US" sz="1800" dirty="0"/>
           </a:p>
@@ -8584,13 +8640,13 @@
       </p:sp>
       <p:sp>
         <p:nvSpPr>
-          <p:cNvPr id="7" name="Text 5"/>
-          <p:cNvSpPr/>
-          <p:nvPr/>
-        </p:nvSpPr>
-        <p:spPr>
-          <a:xfrm>
-            <a:off x="896112" y="3337560"/>
+          <p:cNvPr id="10" name="Text 8"/>
+          <p:cNvSpPr/>
+          <p:nvPr/>
+        </p:nvSpPr>
+        <p:spPr>
+          <a:xfrm>
+            <a:off x="896112" y="4809744"/>
             <a:ext cx="10454335" cy="397764"/>
           </a:xfrm>
           <a:prstGeom prst="rect">
@@ -8632,7 +8688,7 @@
                   <a:srgbClr val="000000"/>
                 </a:solidFill>
               </a:rPr>
-              <a:t>③ 堆区画四格：标"malloc要到的地方"，这片格子没有名字，只有地址</a:t>
+              <a:t>arr[i]就是*(arr+i)：指针当数组名用，下标照样使</a:t>
             </a:r>
             <a:endParaRPr lang="en-US" sz="1800" dirty="0"/>
           </a:p>
@@ -8640,13 +8696,13 @@
       </p:sp>
       <p:sp>
         <p:nvSpPr>
-          <p:cNvPr id="8" name="Text 6"/>
-          <p:cNvSpPr/>
-          <p:nvPr/>
-        </p:nvSpPr>
-        <p:spPr>
-          <a:xfrm>
-            <a:off x="896112" y="3808476"/>
+          <p:cNvPr id="11" name="Text 9"/>
+          <p:cNvSpPr/>
+          <p:nvPr/>
+        </p:nvSpPr>
+        <p:spPr>
+          <a:xfrm>
+            <a:off x="896112" y="5280660"/>
             <a:ext cx="10454335" cy="397764"/>
           </a:xfrm>
           <a:prstGeom prst="rect">
@@ -8688,7 +8744,7 @@
                   <a:srgbClr val="000000"/>
                 </a:solidFill>
               </a:rPr>
-              <a:t>④ 从p画箭头穿过两区指到堆上格子：栈上住指针，堆上住数据，一根箭头连两头</a:t>
+              <a:t>sizeof(arr)算的是指针大小不是数组大小，长度要自己用变量记</a:t>
             </a:r>
             <a:endParaRPr lang="en-US" sz="1800" dirty="0"/>
           </a:p>
